--- a/classes/parte-14-grc-riesgo-y-cumplimiento/290-certificaciones-y-desarrollo-de-carrera/clase-290-presentacion.pptx
+++ b/classes/parte-14-grc-riesgo-y-cumplimiento/290-certificaciones-y-desarrollo-de-carrera/clase-290-presentacion.pptx
@@ -17,6 +17,10 @@
     <p:sldId id="265" r:id="rId16"/>
     <p:sldId id="266" r:id="rId17"/>
     <p:sldId id="267" r:id="rId18"/>
+    <p:sldId id="268" r:id="rId19"/>
+    <p:sldId id="269" r:id="rId20"/>
+    <p:sldId id="270" r:id="rId21"/>
+    <p:sldId id="271" r:id="rId22"/>
   </p:sldIdLst>
   <p:sldSz cx="9144000" cy="6858000" type="screen4x3"/>
   <p:notesSz cx="6858000" cy="9144000"/>
@@ -3198,7 +3202,7 @@
                   <a:srgbClr val="0B3D2E"/>
                 </a:solidFill>
               </a:rPr>
-              <a:t>⚠️ Errores comunes</a:t>
+              <a:t>🧪 Laboratorio guiado (ejercicio aplicado)</a:t>
             </a:r>
           </a:p>
         </p:txBody>
@@ -3236,67 +3240,97 @@
                   <a:srgbClr val="22282E"/>
                 </a:solidFill>
               </a:rPr>
-              <a:t>•  Coleccionar certificaciones sin práctica — El título sin evidencia convence poco; construye portfolio</a:t>
-            </a:r>
-          </a:p>
-          <a:p>
-            <a:pPr>
-              <a:spcAft>
-                <a:spcPts val="600"/>
-              </a:spcAft>
-            </a:pPr>
-            <a:r>
-              <a:rPr sz="1500">
-                <a:solidFill>
-                  <a:srgbClr val="22282E"/>
-                </a:solidFill>
-              </a:rPr>
-              <a:t>•  Empezar por una cert avanzada (OSCP/CISSP) sin base — Frustración y coste; sigue una secuencia por etapas</a:t>
-            </a:r>
-          </a:p>
-          <a:p>
-            <a:pPr>
-              <a:spcAft>
-                <a:spcPts val="600"/>
-              </a:spcAft>
-            </a:pPr>
-            <a:r>
-              <a:rPr sz="1500">
-                <a:solidFill>
-                  <a:srgbClr val="22282E"/>
-                </a:solidFill>
-              </a:rPr>
-              <a:t>•  Presentar CISSP sin la experiencia requerida — Queda como "Associate" hasta cumplirla; planifica la experiencia</a:t>
-            </a:r>
-          </a:p>
-          <a:p>
-            <a:pPr>
-              <a:spcAft>
-                <a:spcPts val="600"/>
-              </a:spcAft>
-            </a:pPr>
-            <a:r>
-              <a:rPr sz="1500">
-                <a:solidFill>
-                  <a:srgbClr val="22282E"/>
-                </a:solidFill>
-              </a:rPr>
-              <a:t>•  Portfolio vacío — No demuestra competencia; publica writeups de tus labs</a:t>
-            </a:r>
-          </a:p>
-          <a:p>
-            <a:pPr>
-              <a:spcAft>
-                <a:spcPts val="600"/>
-              </a:spcAft>
-            </a:pPr>
-            <a:r>
-              <a:rPr sz="1500">
-                <a:solidFill>
-                  <a:srgbClr val="22282E"/>
-                </a:solidFill>
-              </a:rPr>
-              <a:t>•  Ignorar los CPE — Puedes perder la certificación; planifica formación continua</a:t>
+              <a:t>•  Vas a construir tu plan de desarrollo profesional personal.</a:t>
+            </a:r>
+          </a:p>
+          <a:p>
+            <a:pPr>
+              <a:spcAft>
+                <a:spcPts val="600"/>
+              </a:spcAft>
+            </a:pPr>
+            <a:r>
+              <a:rPr sz="1500">
+                <a:solidFill>
+                  <a:srgbClr val="22282E"/>
+                </a:solidFill>
+              </a:rPr>
+              <a:t>•  Autoevaluación: usando las distintas partes del programa, puntúa de 1 a 5 tu nivel en 6 áreas (redes, ofensiva, defensiva/SOC, cloud, appsec, GRC). Identifica tus 2 fortalezas y 2 huecos.</a:t>
+            </a:r>
+          </a:p>
+          <a:p>
+            <a:pPr>
+              <a:spcAft>
+                <a:spcPts val="600"/>
+              </a:spcAft>
+            </a:pPr>
+            <a:r>
+              <a:rPr sz="1500">
+                <a:solidFill>
+                  <a:srgbClr val="22282E"/>
+                </a:solidFill>
+              </a:rPr>
+              <a:t>•  Elección de ruta: decide una ruta principal (ofensiva / defensiva / GRC / cloud / appsec) y una secundaria, alineadas con tus fortalezas e intereses.</a:t>
+            </a:r>
+          </a:p>
+          <a:p>
+            <a:pPr>
+              <a:spcAft>
+                <a:spcPts val="600"/>
+              </a:spcAft>
+            </a:pPr>
+            <a:r>
+              <a:rPr sz="1500">
+                <a:solidFill>
+                  <a:srgbClr val="22282E"/>
+                </a:solidFill>
+              </a:rPr>
+              <a:t>•  Mapa de roles: para tu ruta, identifica 3 roles objetivo (p. ej. GRC → analista de riesgo, auditor de seguridad, consultor de cumplimiento) y las competencias que exige cada uno según el NICE…</a:t>
+            </a:r>
+          </a:p>
+          <a:p>
+            <a:pPr>
+              <a:spcAft>
+                <a:spcPts val="600"/>
+              </a:spcAft>
+            </a:pPr>
+            <a:r>
+              <a:rPr sz="1500">
+                <a:solidFill>
+                  <a:srgbClr val="22282E"/>
+                </a:solidFill>
+              </a:rPr>
+              <a:t>•  Plan de certificaciones: define una secuencia realista a 24 meses. Ejemplo GRC: Security+ → CISA o ISO 27001 Lead Implementer → CISSP (con experiencia). Ejemplo ofensiva: Security+ → eJPT/PNPT → OSCP.</a:t>
+            </a:r>
+          </a:p>
+          <a:p>
+            <a:pPr>
+              <a:spcAft>
+                <a:spcPts val="600"/>
+              </a:spcAft>
+            </a:pPr>
+            <a:r>
+              <a:rPr sz="1500">
+                <a:solidFill>
+                  <a:srgbClr val="22282E"/>
+                </a:solidFill>
+              </a:rPr>
+              <a:t>•  Portfolio: elige 3 laboratorios de este programa (p. ej. la matriz de riesgo de la clase 277, el SoA de la 278, el SBOM de la 284) y planifica publicarlos como writeups en tu repositorio.</a:t>
+            </a:r>
+          </a:p>
+          <a:p>
+            <a:pPr>
+              <a:spcAft>
+                <a:spcPts val="600"/>
+              </a:spcAft>
+            </a:pPr>
+            <a:r>
+              <a:rPr sz="1500">
+                <a:solidFill>
+                  <a:srgbClr val="22282E"/>
+                </a:solidFill>
+              </a:rPr>
+              <a:t>•  Plan de estudio: para la primera certificación objetivo, desglosa los dominios del examen, asigna semanas de estudio y define cómo practicarás (labs, exámenes de prueba).</a:t>
             </a:r>
           </a:p>
         </p:txBody>
@@ -3347,7 +3381,7 @@
                   <a:srgbClr val="0B3D2E"/>
                 </a:solidFill>
               </a:rPr>
-              <a:t>❓ Preguntas frecuentes</a:t>
+              <a:t>✍️ Ejercicios</a:t>
             </a:r>
           </a:p>
         </p:txBody>
@@ -3385,97 +3419,82 @@
                   <a:srgbClr val="22282E"/>
                 </a:solidFill>
               </a:rPr>
-              <a:t>•  ❓ ¿Qué certificación hago primero?</a:t>
-            </a:r>
-          </a:p>
-          <a:p>
-            <a:pPr>
-              <a:spcAft>
-                <a:spcPts val="600"/>
-              </a:spcAft>
-            </a:pPr>
-            <a:r>
-              <a:rPr sz="1500">
-                <a:solidFill>
-                  <a:srgbClr val="22282E"/>
-                </a:solidFill>
-              </a:rPr>
-              <a:t>•  Si empiezas, una fundacional como CompTIA Security+ da base y abre puertas. Después elige según tu ruta: OSCP (ofensiva), CISSP (gestión), CCSP (cloud), CISA (auditoría), ISO 27001 Lead (GRC).</a:t>
-            </a:r>
-          </a:p>
-          <a:p>
-            <a:pPr>
-              <a:spcAft>
-                <a:spcPts val="600"/>
-              </a:spcAft>
-            </a:pPr>
-            <a:r>
-              <a:rPr sz="1500">
-                <a:solidFill>
-                  <a:srgbClr val="22282E"/>
-                </a:solidFill>
-              </a:rPr>
-              <a:t>•  ❓ ¿Vale más un título o un portfolio?</a:t>
-            </a:r>
-          </a:p>
-          <a:p>
-            <a:pPr>
-              <a:spcAft>
-                <a:spcPts val="600"/>
-              </a:spcAft>
-            </a:pPr>
-            <a:r>
-              <a:rPr sz="1500">
-                <a:solidFill>
-                  <a:srgbClr val="22282E"/>
-                </a:solidFill>
-              </a:rPr>
-              <a:t>•  Ambos suman, pero un portfolio con proyectos y writeups reales demuestra competencia práctica que un título por sí solo no garantiza. Combínalos.</a:t>
-            </a:r>
-          </a:p>
-          <a:p>
-            <a:pPr>
-              <a:spcAft>
-                <a:spcPts val="600"/>
-              </a:spcAft>
-            </a:pPr>
-            <a:r>
-              <a:rPr sz="1500">
-                <a:solidFill>
-                  <a:srgbClr val="22282E"/>
-                </a:solidFill>
-              </a:rPr>
-              <a:t>•  ❓ ¿Necesito CISSP para trabajar en GRC?</a:t>
-            </a:r>
-          </a:p>
-          <a:p>
-            <a:pPr>
-              <a:spcAft>
-                <a:spcPts val="600"/>
-              </a:spcAft>
-            </a:pPr>
-            <a:r>
-              <a:rPr sz="1500">
-                <a:solidFill>
-                  <a:srgbClr val="22282E"/>
-                </a:solidFill>
-              </a:rPr>
-              <a:t>•  No para empezar. CISSP exige 5 años de experiencia y es un objetivo a medio plazo; antes puedes avanzar con Security+, CISA o certificaciones ISO 27001.</a:t>
-            </a:r>
-          </a:p>
-          <a:p>
-            <a:pPr>
-              <a:spcAft>
-                <a:spcPts val="600"/>
-              </a:spcAft>
-            </a:pPr>
-            <a:r>
-              <a:rPr sz="1500">
-                <a:solidFill>
-                  <a:srgbClr val="22282E"/>
-                </a:solidFill>
-              </a:rPr>
-              <a:t>•  ❓ ¿Cómo mantengo mis certificaciones?</a:t>
+              <a:t>•  Mapea 3 roles del NICE Framework a las competencias que aportan las partes de este programa.</a:t>
+            </a:r>
+          </a:p>
+          <a:p>
+            <a:pPr>
+              <a:spcAft>
+                <a:spcPts val="600"/>
+              </a:spcAft>
+            </a:pPr>
+            <a:r>
+              <a:rPr sz="1500">
+                <a:solidFill>
+                  <a:srgbClr val="22282E"/>
+                </a:solidFill>
+              </a:rPr>
+              <a:t>•  Compara CISSP y OSCP: propósito, formato y a quién sirven.</a:t>
+            </a:r>
+          </a:p>
+          <a:p>
+            <a:pPr>
+              <a:spcAft>
+                <a:spcPts val="600"/>
+              </a:spcAft>
+            </a:pPr>
+            <a:r>
+              <a:rPr sz="1500">
+                <a:solidFill>
+                  <a:srgbClr val="22282E"/>
+                </a:solidFill>
+              </a:rPr>
+              <a:t>•  Diseña un plan de estudio de 8 semanas para Security+.</a:t>
+            </a:r>
+          </a:p>
+          <a:p>
+            <a:pPr>
+              <a:spcAft>
+                <a:spcPts val="600"/>
+              </a:spcAft>
+            </a:pPr>
+            <a:r>
+              <a:rPr sz="1500">
+                <a:solidFill>
+                  <a:srgbClr val="22282E"/>
+                </a:solidFill>
+              </a:rPr>
+              <a:t>•  Elige 3 proyectos del curso y explica cómo los presentarías en una entrevista.</a:t>
+            </a:r>
+          </a:p>
+          <a:p>
+            <a:pPr>
+              <a:spcAft>
+                <a:spcPts val="600"/>
+              </a:spcAft>
+            </a:pPr>
+            <a:r>
+              <a:rPr sz="1500">
+                <a:solidFill>
+                  <a:srgbClr val="22282E"/>
+                </a:solidFill>
+              </a:rPr>
+              <a:t>•  Redacta tu titular profesional y un resumen de 4 líneas para LinkedIn.</a:t>
+            </a:r>
+          </a:p>
+          <a:p>
+            <a:pPr>
+              <a:spcAft>
+                <a:spcPts val="600"/>
+              </a:spcAft>
+            </a:pPr>
+            <a:r>
+              <a:rPr sz="1500">
+                <a:solidFill>
+                  <a:srgbClr val="22282E"/>
+                </a:solidFill>
+              </a:rPr>
+              <a:t>•  Analiza un dilema ético (bug bounty fuera de alcance) según un código de conducta.</a:t>
             </a:r>
           </a:p>
         </p:txBody>
@@ -3526,7 +3545,7 @@
                   <a:srgbClr val="0B3D2E"/>
                 </a:solidFill>
               </a:rPr>
-              <a:t>🔗 Referencias</a:t>
+              <a:t>📝 Reto verificable</a:t>
             </a:r>
           </a:p>
         </p:txBody>
@@ -3564,6 +3583,438 @@
                   <a:srgbClr val="22282E"/>
                 </a:solidFill>
               </a:rPr>
+              <a:t>•  Entrega tu plan de desarrollo profesional personal con: autoevaluación por áreas, ruta elegida, 3 roles objetivo con competencias NICE, secuencia de certificaciones a 24 meses, plan de estudio de la…</a:t>
+            </a:r>
+          </a:p>
+          <a:p>
+            <a:pPr>
+              <a:spcAft>
+                <a:spcPts val="600"/>
+              </a:spcAft>
+            </a:pPr>
+            <a:r>
+              <a:rPr sz="1500">
+                <a:solidFill>
+                  <a:srgbClr val="22282E"/>
+                </a:solidFill>
+              </a:rPr>
+              <a:t>•  Criterio de aceptación: la ruta y las certificaciones son coherentes con las fortalezas de la autoevaluación, el plan de estudio tiene hitos temporales concretos, y el portfolio referencia labs…</a:t>
+            </a:r>
+          </a:p>
+        </p:txBody>
+      </p:sp>
+    </p:spTree>
+  </p:cSld>
+  <p:clrMapOvr>
+    <a:masterClrMapping/>
+  </p:clrMapOvr>
+</p:sld>
+</file>
+
+<file path=ppt/slides/slide13.xml><?xml version="1.0" encoding="utf-8"?>
+<p:sld xmlns:a="http://schemas.openxmlformats.org/drawingml/2006/main" xmlns:p="http://schemas.openxmlformats.org/presentationml/2006/main" xmlns:r="http://schemas.openxmlformats.org/officeDocument/2006/relationships">
+  <p:cSld>
+    <p:spTree>
+      <p:nvGrpSpPr>
+        <p:cNvPr id="1" name=""/>
+        <p:cNvGrpSpPr/>
+        <p:nvPr/>
+      </p:nvGrpSpPr>
+      <p:grpSpPr/>
+      <p:sp>
+        <p:nvSpPr>
+          <p:cNvPr id="2" name="TextBox 1"/>
+          <p:cNvSpPr txBox="1"/>
+          <p:nvPr/>
+        </p:nvSpPr>
+        <p:spPr>
+          <a:xfrm>
+            <a:off x="457200" y="320040"/>
+            <a:ext cx="8229600" cy="822960"/>
+          </a:xfrm>
+          <a:prstGeom prst="rect">
+            <a:avLst/>
+          </a:prstGeom>
+          <a:noFill/>
+        </p:spPr>
+        <p:txBody>
+          <a:bodyPr wrap="square">
+            <a:spAutoFit/>
+          </a:bodyPr>
+          <a:lstStyle/>
+          <a:p>
+            <a:r>
+              <a:rPr sz="2600" b="1">
+                <a:solidFill>
+                  <a:srgbClr val="0B3D2E"/>
+                </a:solidFill>
+              </a:rPr>
+              <a:t>⚠️ Errores comunes</a:t>
+            </a:r>
+          </a:p>
+        </p:txBody>
+      </p:sp>
+      <p:sp>
+        <p:nvSpPr>
+          <p:cNvPr id="3" name="TextBox 2"/>
+          <p:cNvSpPr txBox="1"/>
+          <p:nvPr/>
+        </p:nvSpPr>
+        <p:spPr>
+          <a:xfrm>
+            <a:off x="457200" y="1280160"/>
+            <a:ext cx="8229600" cy="4937760"/>
+          </a:xfrm>
+          <a:prstGeom prst="rect">
+            <a:avLst/>
+          </a:prstGeom>
+          <a:noFill/>
+        </p:spPr>
+        <p:txBody>
+          <a:bodyPr wrap="square">
+            <a:spAutoFit/>
+          </a:bodyPr>
+          <a:lstStyle/>
+          <a:p>
+            <a:pPr>
+              <a:spcAft>
+                <a:spcPts val="600"/>
+              </a:spcAft>
+            </a:pPr>
+            <a:r>
+              <a:rPr sz="1500">
+                <a:solidFill>
+                  <a:srgbClr val="22282E"/>
+                </a:solidFill>
+              </a:rPr>
+              <a:t>•  Coleccionar certificaciones sin práctica — El título sin evidencia convence poco; construye portfolio</a:t>
+            </a:r>
+          </a:p>
+          <a:p>
+            <a:pPr>
+              <a:spcAft>
+                <a:spcPts val="600"/>
+              </a:spcAft>
+            </a:pPr>
+            <a:r>
+              <a:rPr sz="1500">
+                <a:solidFill>
+                  <a:srgbClr val="22282E"/>
+                </a:solidFill>
+              </a:rPr>
+              <a:t>•  Empezar por una cert avanzada (OSCP/CISSP) sin base — Frustración y coste; sigue una secuencia por etapas</a:t>
+            </a:r>
+          </a:p>
+          <a:p>
+            <a:pPr>
+              <a:spcAft>
+                <a:spcPts val="600"/>
+              </a:spcAft>
+            </a:pPr>
+            <a:r>
+              <a:rPr sz="1500">
+                <a:solidFill>
+                  <a:srgbClr val="22282E"/>
+                </a:solidFill>
+              </a:rPr>
+              <a:t>•  Presentar CISSP sin la experiencia requerida — Queda como "Associate" hasta cumplirla; planifica la experiencia</a:t>
+            </a:r>
+          </a:p>
+          <a:p>
+            <a:pPr>
+              <a:spcAft>
+                <a:spcPts val="600"/>
+              </a:spcAft>
+            </a:pPr>
+            <a:r>
+              <a:rPr sz="1500">
+                <a:solidFill>
+                  <a:srgbClr val="22282E"/>
+                </a:solidFill>
+              </a:rPr>
+              <a:t>•  Portfolio vacío — No demuestra competencia; publica writeups de tus labs</a:t>
+            </a:r>
+          </a:p>
+          <a:p>
+            <a:pPr>
+              <a:spcAft>
+                <a:spcPts val="600"/>
+              </a:spcAft>
+            </a:pPr>
+            <a:r>
+              <a:rPr sz="1500">
+                <a:solidFill>
+                  <a:srgbClr val="22282E"/>
+                </a:solidFill>
+              </a:rPr>
+              <a:t>•  Ignorar los CPE — Puedes perder la certificación; planifica formación continua</a:t>
+            </a:r>
+          </a:p>
+        </p:txBody>
+      </p:sp>
+    </p:spTree>
+  </p:cSld>
+  <p:clrMapOvr>
+    <a:masterClrMapping/>
+  </p:clrMapOvr>
+</p:sld>
+</file>
+
+<file path=ppt/slides/slide14.xml><?xml version="1.0" encoding="utf-8"?>
+<p:sld xmlns:a="http://schemas.openxmlformats.org/drawingml/2006/main" xmlns:p="http://schemas.openxmlformats.org/presentationml/2006/main" xmlns:r="http://schemas.openxmlformats.org/officeDocument/2006/relationships">
+  <p:cSld>
+    <p:spTree>
+      <p:nvGrpSpPr>
+        <p:cNvPr id="1" name=""/>
+        <p:cNvGrpSpPr/>
+        <p:nvPr/>
+      </p:nvGrpSpPr>
+      <p:grpSpPr/>
+      <p:sp>
+        <p:nvSpPr>
+          <p:cNvPr id="2" name="TextBox 1"/>
+          <p:cNvSpPr txBox="1"/>
+          <p:nvPr/>
+        </p:nvSpPr>
+        <p:spPr>
+          <a:xfrm>
+            <a:off x="457200" y="320040"/>
+            <a:ext cx="8229600" cy="822960"/>
+          </a:xfrm>
+          <a:prstGeom prst="rect">
+            <a:avLst/>
+          </a:prstGeom>
+          <a:noFill/>
+        </p:spPr>
+        <p:txBody>
+          <a:bodyPr wrap="square">
+            <a:spAutoFit/>
+          </a:bodyPr>
+          <a:lstStyle/>
+          <a:p>
+            <a:r>
+              <a:rPr sz="2600" b="1">
+                <a:solidFill>
+                  <a:srgbClr val="0B3D2E"/>
+                </a:solidFill>
+              </a:rPr>
+              <a:t>❓ Preguntas frecuentes</a:t>
+            </a:r>
+          </a:p>
+        </p:txBody>
+      </p:sp>
+      <p:sp>
+        <p:nvSpPr>
+          <p:cNvPr id="3" name="TextBox 2"/>
+          <p:cNvSpPr txBox="1"/>
+          <p:nvPr/>
+        </p:nvSpPr>
+        <p:spPr>
+          <a:xfrm>
+            <a:off x="457200" y="1280160"/>
+            <a:ext cx="8229600" cy="4937760"/>
+          </a:xfrm>
+          <a:prstGeom prst="rect">
+            <a:avLst/>
+          </a:prstGeom>
+          <a:noFill/>
+        </p:spPr>
+        <p:txBody>
+          <a:bodyPr wrap="square">
+            <a:spAutoFit/>
+          </a:bodyPr>
+          <a:lstStyle/>
+          <a:p>
+            <a:pPr>
+              <a:spcAft>
+                <a:spcPts val="600"/>
+              </a:spcAft>
+            </a:pPr>
+            <a:r>
+              <a:rPr sz="1500">
+                <a:solidFill>
+                  <a:srgbClr val="22282E"/>
+                </a:solidFill>
+              </a:rPr>
+              <a:t>•  ❓ ¿Qué certificación hago primero?</a:t>
+            </a:r>
+          </a:p>
+          <a:p>
+            <a:pPr>
+              <a:spcAft>
+                <a:spcPts val="600"/>
+              </a:spcAft>
+            </a:pPr>
+            <a:r>
+              <a:rPr sz="1500">
+                <a:solidFill>
+                  <a:srgbClr val="22282E"/>
+                </a:solidFill>
+              </a:rPr>
+              <a:t>•  Si empiezas, una fundacional como CompTIA Security+ da base y abre puertas. Después elige según tu ruta: OSCP (ofensiva), CISSP (gestión), CCSP (cloud), CISA (auditoría), ISO 27001 Lead (GRC).</a:t>
+            </a:r>
+          </a:p>
+          <a:p>
+            <a:pPr>
+              <a:spcAft>
+                <a:spcPts val="600"/>
+              </a:spcAft>
+            </a:pPr>
+            <a:r>
+              <a:rPr sz="1500">
+                <a:solidFill>
+                  <a:srgbClr val="22282E"/>
+                </a:solidFill>
+              </a:rPr>
+              <a:t>•  ❓ ¿Vale más un título o un portfolio?</a:t>
+            </a:r>
+          </a:p>
+          <a:p>
+            <a:pPr>
+              <a:spcAft>
+                <a:spcPts val="600"/>
+              </a:spcAft>
+            </a:pPr>
+            <a:r>
+              <a:rPr sz="1500">
+                <a:solidFill>
+                  <a:srgbClr val="22282E"/>
+                </a:solidFill>
+              </a:rPr>
+              <a:t>•  Ambos suman, pero un portfolio con proyectos y writeups reales demuestra competencia práctica que un título por sí solo no garantiza. Combínalos.</a:t>
+            </a:r>
+          </a:p>
+          <a:p>
+            <a:pPr>
+              <a:spcAft>
+                <a:spcPts val="600"/>
+              </a:spcAft>
+            </a:pPr>
+            <a:r>
+              <a:rPr sz="1500">
+                <a:solidFill>
+                  <a:srgbClr val="22282E"/>
+                </a:solidFill>
+              </a:rPr>
+              <a:t>•  ❓ ¿Necesito CISSP para trabajar en GRC?</a:t>
+            </a:r>
+          </a:p>
+          <a:p>
+            <a:pPr>
+              <a:spcAft>
+                <a:spcPts val="600"/>
+              </a:spcAft>
+            </a:pPr>
+            <a:r>
+              <a:rPr sz="1500">
+                <a:solidFill>
+                  <a:srgbClr val="22282E"/>
+                </a:solidFill>
+              </a:rPr>
+              <a:t>•  No para empezar. CISSP exige 5 años de experiencia y es un objetivo a medio plazo; antes puedes avanzar con Security+, CISA o certificaciones ISO 27001.</a:t>
+            </a:r>
+          </a:p>
+          <a:p>
+            <a:pPr>
+              <a:spcAft>
+                <a:spcPts val="600"/>
+              </a:spcAft>
+            </a:pPr>
+            <a:r>
+              <a:rPr sz="1500">
+                <a:solidFill>
+                  <a:srgbClr val="22282E"/>
+                </a:solidFill>
+              </a:rPr>
+              <a:t>•  ❓ ¿Cómo mantengo mis certificaciones?</a:t>
+            </a:r>
+          </a:p>
+        </p:txBody>
+      </p:sp>
+    </p:spTree>
+  </p:cSld>
+  <p:clrMapOvr>
+    <a:masterClrMapping/>
+  </p:clrMapOvr>
+</p:sld>
+</file>
+
+<file path=ppt/slides/slide15.xml><?xml version="1.0" encoding="utf-8"?>
+<p:sld xmlns:a="http://schemas.openxmlformats.org/drawingml/2006/main" xmlns:p="http://schemas.openxmlformats.org/presentationml/2006/main" xmlns:r="http://schemas.openxmlformats.org/officeDocument/2006/relationships">
+  <p:cSld>
+    <p:spTree>
+      <p:nvGrpSpPr>
+        <p:cNvPr id="1" name=""/>
+        <p:cNvGrpSpPr/>
+        <p:nvPr/>
+      </p:nvGrpSpPr>
+      <p:grpSpPr/>
+      <p:sp>
+        <p:nvSpPr>
+          <p:cNvPr id="2" name="TextBox 1"/>
+          <p:cNvSpPr txBox="1"/>
+          <p:nvPr/>
+        </p:nvSpPr>
+        <p:spPr>
+          <a:xfrm>
+            <a:off x="457200" y="320040"/>
+            <a:ext cx="8229600" cy="822960"/>
+          </a:xfrm>
+          <a:prstGeom prst="rect">
+            <a:avLst/>
+          </a:prstGeom>
+          <a:noFill/>
+        </p:spPr>
+        <p:txBody>
+          <a:bodyPr wrap="square">
+            <a:spAutoFit/>
+          </a:bodyPr>
+          <a:lstStyle/>
+          <a:p>
+            <a:r>
+              <a:rPr sz="2600" b="1">
+                <a:solidFill>
+                  <a:srgbClr val="0B3D2E"/>
+                </a:solidFill>
+              </a:rPr>
+              <a:t>🔗 Referencias</a:t>
+            </a:r>
+          </a:p>
+        </p:txBody>
+      </p:sp>
+      <p:sp>
+        <p:nvSpPr>
+          <p:cNvPr id="3" name="TextBox 2"/>
+          <p:cNvSpPr txBox="1"/>
+          <p:nvPr/>
+        </p:nvSpPr>
+        <p:spPr>
+          <a:xfrm>
+            <a:off x="457200" y="1280160"/>
+            <a:ext cx="8229600" cy="4937760"/>
+          </a:xfrm>
+          <a:prstGeom prst="rect">
+            <a:avLst/>
+          </a:prstGeom>
+          <a:noFill/>
+        </p:spPr>
+        <p:txBody>
+          <a:bodyPr wrap="square">
+            <a:spAutoFit/>
+          </a:bodyPr>
+          <a:lstStyle/>
+          <a:p>
+            <a:pPr>
+              <a:spcAft>
+                <a:spcPts val="600"/>
+              </a:spcAft>
+            </a:pPr>
+            <a:r>
+              <a:rPr sz="1500">
+                <a:solidFill>
+                  <a:srgbClr val="22282E"/>
+                </a:solidFill>
+              </a:rPr>
               <a:t>•  NICE Framework — NIST SP 800-181 Rev.1. &lt;https://csrc.nist.gov/pubs/sp/800/181/r1/final&gt;</a:t>
             </a:r>
           </a:p>
@@ -3629,6 +4080,81 @@
           </a:p>
         </p:txBody>
       </p:sp>
+    </p:spTree>
+  </p:cSld>
+  <p:clrMapOvr>
+    <a:masterClrMapping/>
+  </p:clrMapOvr>
+</p:sld>
+</file>
+
+<file path=ppt/slides/slide16.xml><?xml version="1.0" encoding="utf-8"?>
+<p:sld xmlns:a="http://schemas.openxmlformats.org/drawingml/2006/main" xmlns:p="http://schemas.openxmlformats.org/presentationml/2006/main" xmlns:r="http://schemas.openxmlformats.org/officeDocument/2006/relationships">
+  <p:cSld>
+    <p:spTree>
+      <p:nvGrpSpPr>
+        <p:cNvPr id="1" name=""/>
+        <p:cNvGrpSpPr/>
+        <p:nvPr/>
+      </p:nvGrpSpPr>
+      <p:grpSpPr/>
+      <p:sp>
+        <p:nvSpPr>
+          <p:cNvPr id="2" name="TextBox 1"/>
+          <p:cNvSpPr txBox="1"/>
+          <p:nvPr/>
+        </p:nvSpPr>
+        <p:spPr>
+          <a:xfrm>
+            <a:off x="457200" y="274320"/>
+            <a:ext cx="8229600" cy="640080"/>
+          </a:xfrm>
+          <a:prstGeom prst="rect">
+            <a:avLst/>
+          </a:prstGeom>
+          <a:noFill/>
+        </p:spPr>
+        <p:txBody>
+          <a:bodyPr wrap="square">
+            <a:spAutoFit/>
+          </a:bodyPr>
+          <a:lstStyle/>
+          <a:p>
+            <a:r>
+              <a:rPr sz="2200" b="1">
+                <a:solidFill>
+                  <a:srgbClr val="0B3D2E"/>
+                </a:solidFill>
+              </a:rPr>
+              <a:t>Diagrama de la clase</a:t>
+            </a:r>
+          </a:p>
+        </p:txBody>
+      </p:sp>
+      <p:pic>
+        <p:nvPicPr>
+          <p:cNvPr id="3" name="Picture 2" descr="d9d3ae27b5bb93c8.png"/>
+          <p:cNvPicPr>
+            <a:picLocks noChangeAspect="1"/>
+          </p:cNvPicPr>
+          <p:nvPr/>
+        </p:nvPicPr>
+        <p:blipFill>
+          <a:blip r:embed="rId2"/>
+          <a:stretch>
+            <a:fillRect/>
+          </a:stretch>
+        </p:blipFill>
+        <p:spPr>
+          <a:xfrm>
+            <a:off x="457200" y="3493008"/>
+            <a:ext cx="8229600" cy="512064"/>
+          </a:xfrm>
+          <a:prstGeom prst="rect">
+            <a:avLst/>
+          </a:prstGeom>
+        </p:spPr>
+      </p:pic>
     </p:spTree>
   </p:cSld>
   <p:clrMapOvr>
@@ -3713,7 +4239,7 @@
                   <a:srgbClr val="22282E"/>
                 </a:solidFill>
               </a:rPr>
-              <a:t>•  Orientar tu carrera en ciberseguridad tras completar el programa: qué roles existen, qué certificaciones aportan valor real en cada etapa, cómo construir un plan de desarrollo profesional y un portfolio que demuestre competencia. Al terminar tendrás un mapa de roles y certificaciones, un plan personal a 12–24 meses y las bases para presentarte a empleadores con evidencia, no solo con títulos.</a:t>
+              <a:t>•  Orientar tu carrera en ciberseguridad tras completar el programa: qué roles existen, qué certificaciones aportan valor real en cada etapa, cómo construir un plan de desarrollo profesional y un…</a:t>
             </a:r>
           </a:p>
         </p:txBody>
@@ -4107,7 +4633,7 @@
                   <a:srgbClr val="0B3D2E"/>
                 </a:solidFill>
               </a:rPr>
-              <a:t>📖 Definiciones y características</a:t>
+              <a:t>🧠 Explicación en profundidad</a:t>
             </a:r>
           </a:p>
         </p:txBody>
@@ -4145,82 +4671,22 @@
                   <a:srgbClr val="22282E"/>
                 </a:solidFill>
               </a:rPr>
-              <a:t>•  NICE Framework: marco de NIST que describe roles, tareas y competencias en ciberseguridad. Clave: lenguaje común para roles y planes de carrera.</a:t>
-            </a:r>
-          </a:p>
-          <a:p>
-            <a:pPr>
-              <a:spcAft>
-                <a:spcPts val="600"/>
-              </a:spcAft>
-            </a:pPr>
-            <a:r>
-              <a:rPr sz="1500">
-                <a:solidFill>
-                  <a:srgbClr val="22282E"/>
-                </a:solidFill>
-              </a:rPr>
-              <a:t>•  Certificación fundacional: valida bases (CompTIA Security+, GSEC). Clave: puerta de entrada, no meta final.</a:t>
-            </a:r>
-          </a:p>
-          <a:p>
-            <a:pPr>
-              <a:spcAft>
-                <a:spcPts val="600"/>
-              </a:spcAft>
-            </a:pPr>
-            <a:r>
-              <a:rPr sz="1500">
-                <a:solidFill>
-                  <a:srgbClr val="22282E"/>
-                </a:solidFill>
-              </a:rPr>
-              <a:t>•  Certificación de especialización: valida un dominio (OSCP ofensivo, CISSP gestión, CCSP cloud, CISA auditoría). Clave: elige según tu ruta.</a:t>
-            </a:r>
-          </a:p>
-          <a:p>
-            <a:pPr>
-              <a:spcAft>
-                <a:spcPts val="600"/>
-              </a:spcAft>
-            </a:pPr>
-            <a:r>
-              <a:rPr sz="1500">
-                <a:solidFill>
-                  <a:srgbClr val="22282E"/>
-                </a:solidFill>
-              </a:rPr>
-              <a:t>•  CPE (Continuing Professional Education): créditos de formación para mantener una certificación. Clave: obligan a aprender de forma continua.</a:t>
-            </a:r>
-          </a:p>
-          <a:p>
-            <a:pPr>
-              <a:spcAft>
-                <a:spcPts val="600"/>
-              </a:spcAft>
-            </a:pPr>
-            <a:r>
-              <a:rPr sz="1500">
-                <a:solidFill>
-                  <a:srgbClr val="22282E"/>
-                </a:solidFill>
-              </a:rPr>
-              <a:t>•  Portfolio: conjunto de evidencias (labs, writeups, proyectos, CTFs) que demuestran competencia. Clave: prueba práctica, no solo teoría.</a:t>
-            </a:r>
-          </a:p>
-          <a:p>
-            <a:pPr>
-              <a:spcAft>
-                <a:spcPts val="600"/>
-              </a:spcAft>
-            </a:pPr>
-            <a:r>
-              <a:rPr sz="1500">
-                <a:solidFill>
-                  <a:srgbClr val="22282E"/>
-                </a:solidFill>
-              </a:rPr>
-              <a:t>•  Código de ética: normas de conducta profesional (p. ej. el Canon de (ISC)²). Clave: su incumplimiento cuesta la certificación y la reputación.</a:t>
+              <a:t>•  Una certificación valida un temario y un mecanismo de evaluación en un momento; no sustituye experiencia ni garantiza empleo. La selección comienza por rol objetivo, brecha comprobada, requisitos…</a:t>
+            </a:r>
+          </a:p>
+          <a:p>
+            <a:pPr>
+              <a:spcAft>
+                <a:spcPts val="600"/>
+              </a:spcAft>
+            </a:pPr>
+            <a:r>
+              <a:rPr sz="1500">
+                <a:solidFill>
+                  <a:srgbClr val="22282E"/>
+                </a:solidFill>
+              </a:rPr>
+              <a:t>•  Un alumno colecciona exámenes pero no puede explicar un informe. Reorienta tiempo a un proyecto trazable y elige una certificación alineada con la siguiente responsabilidad.</a:t>
             </a:r>
           </a:p>
         </p:txBody>
@@ -4271,7 +4737,7 @@
                   <a:srgbClr val="0B3D2E"/>
                 </a:solidFill>
               </a:rPr>
-              <a:t>🧰 Herramientas y preparación</a:t>
+              <a:t>📔 Glosario operativo</a:t>
             </a:r>
           </a:p>
         </p:txBody>
@@ -4309,67 +4775,52 @@
                   <a:srgbClr val="22282E"/>
                 </a:solidFill>
               </a:rPr>
-              <a:t>•  El NICE Framework (NIST SP 800-181) para mapear roles y competencias.</a:t>
-            </a:r>
-          </a:p>
-          <a:p>
-            <a:pPr>
-              <a:spcAft>
-                <a:spcPts val="600"/>
-              </a:spcAft>
-            </a:pPr>
-            <a:r>
-              <a:rPr sz="1500">
-                <a:solidFill>
-                  <a:srgbClr val="22282E"/>
-                </a:solidFill>
-              </a:rPr>
-              <a:t>•  Plataformas de práctica: TryHackMe, Hack The Box, laboratorios propios (los de este programa).</a:t>
-            </a:r>
-          </a:p>
-          <a:p>
-            <a:pPr>
-              <a:spcAft>
-                <a:spcPts val="600"/>
-              </a:spcAft>
-            </a:pPr>
-            <a:r>
-              <a:rPr sz="1500">
-                <a:solidFill>
-                  <a:srgbClr val="22282E"/>
-                </a:solidFill>
-              </a:rPr>
-              <a:t>•  Un repositorio (GitHub/GitLab) para publicar writeups y proyectos como portfolio.</a:t>
-            </a:r>
-          </a:p>
-          <a:p>
-            <a:pPr>
-              <a:spcAft>
-                <a:spcPts val="600"/>
-              </a:spcAft>
-            </a:pPr>
-            <a:r>
-              <a:rPr sz="1500">
-                <a:solidFill>
-                  <a:srgbClr val="22282E"/>
-                </a:solidFill>
-              </a:rPr>
-              <a:t>•  Un perfil profesional actualizado (LinkedIn) y, si aplica, un blog técnico.</a:t>
-            </a:r>
-          </a:p>
-          <a:p>
-            <a:pPr>
-              <a:spcAft>
-                <a:spcPts val="600"/>
-              </a:spcAft>
-            </a:pPr>
-            <a:r>
-              <a:rPr sz="1500">
-                <a:solidFill>
-                  <a:srgbClr val="22282E"/>
-                </a:solidFill>
-              </a:rPr>
-              <a:t>•  Guías oficiales de las certificaciones objetivo (dominios y esquema de examen).</a:t>
+              <a:t>•  Término — Definición</a:t>
+            </a:r>
+          </a:p>
+          <a:p>
+            <a:pPr>
+              <a:spcAft>
+                <a:spcPts val="600"/>
+              </a:spcAft>
+            </a:pPr>
+            <a:r>
+              <a:rPr sz="1500">
+                <a:solidFill>
+                  <a:srgbClr val="22282E"/>
+                </a:solidFill>
+              </a:rPr>
+              <a:t>•  Body of knowledge — Alcance publicado de conocimientos evaluados.</a:t>
+            </a:r>
+          </a:p>
+          <a:p>
+            <a:pPr>
+              <a:spcAft>
+                <a:spcPts val="600"/>
+              </a:spcAft>
+            </a:pPr>
+            <a:r>
+              <a:rPr sz="1500">
+                <a:solidFill>
+                  <a:srgbClr val="22282E"/>
+                </a:solidFill>
+              </a:rPr>
+              <a:t>•  Elegibilidad — Experiencia u otros requisitos para obtener una credencial.</a:t>
+            </a:r>
+          </a:p>
+          <a:p>
+            <a:pPr>
+              <a:spcAft>
+                <a:spcPts val="600"/>
+              </a:spcAft>
+            </a:pPr>
+            <a:r>
+              <a:rPr sz="1500">
+                <a:solidFill>
+                  <a:srgbClr val="22282E"/>
+                </a:solidFill>
+              </a:rPr>
+              <a:t>•  CPE/CE — Desarrollo continuo requerido para mantener algunas credenciales.</a:t>
             </a:r>
           </a:p>
         </p:txBody>
@@ -4420,7 +4871,7 @@
                   <a:srgbClr val="0B3D2E"/>
                 </a:solidFill>
               </a:rPr>
-              <a:t>🧪 Laboratorio guiado (ejercicio aplicado)</a:t>
+              <a:t>✅ Criterio de dominio</a:t>
             </a:r>
           </a:p>
         </p:txBody>
@@ -4458,97 +4909,7 @@
                   <a:srgbClr val="22282E"/>
                 </a:solidFill>
               </a:rPr>
-              <a:t>•  Vas a construir tu plan de desarrollo profesional personal.</a:t>
-            </a:r>
-          </a:p>
-          <a:p>
-            <a:pPr>
-              <a:spcAft>
-                <a:spcPts val="600"/>
-              </a:spcAft>
-            </a:pPr>
-            <a:r>
-              <a:rPr sz="1500">
-                <a:solidFill>
-                  <a:srgbClr val="22282E"/>
-                </a:solidFill>
-              </a:rPr>
-              <a:t>•  Autoevaluación: usando las distintas partes del programa, puntúa de 1 a 5 tu nivel en 6 áreas (redes, ofensiva, defensiva/SOC, cloud, appsec, GRC). Identifica tus 2 fortalezas y 2 huecos.</a:t>
-            </a:r>
-          </a:p>
-          <a:p>
-            <a:pPr>
-              <a:spcAft>
-                <a:spcPts val="600"/>
-              </a:spcAft>
-            </a:pPr>
-            <a:r>
-              <a:rPr sz="1500">
-                <a:solidFill>
-                  <a:srgbClr val="22282E"/>
-                </a:solidFill>
-              </a:rPr>
-              <a:t>•  Elección de ruta: decide una ruta principal (ofensiva / defensiva / GRC / cloud / appsec) y una secundaria, alineadas con tus fortalezas e intereses.</a:t>
-            </a:r>
-          </a:p>
-          <a:p>
-            <a:pPr>
-              <a:spcAft>
-                <a:spcPts val="600"/>
-              </a:spcAft>
-            </a:pPr>
-            <a:r>
-              <a:rPr sz="1500">
-                <a:solidFill>
-                  <a:srgbClr val="22282E"/>
-                </a:solidFill>
-              </a:rPr>
-              <a:t>•  Mapa de roles: para tu ruta, identifica 3 roles objetivo (p. ej. GRC → analista de riesgo, auditor de seguridad, consultor de cumplimiento) y las competencias que exige cada uno según el NICE Framework.</a:t>
-            </a:r>
-          </a:p>
-          <a:p>
-            <a:pPr>
-              <a:spcAft>
-                <a:spcPts val="600"/>
-              </a:spcAft>
-            </a:pPr>
-            <a:r>
-              <a:rPr sz="1500">
-                <a:solidFill>
-                  <a:srgbClr val="22282E"/>
-                </a:solidFill>
-              </a:rPr>
-              <a:t>•  Plan de certificaciones: define una secuencia realista a 24 meses. Ejemplo GRC: Security+ → CISA o ISO 27001 Lead Implementer → CISSP (con experiencia). Ejemplo ofensiva: Security+ → eJPT/PNPT → OSCP.</a:t>
-            </a:r>
-          </a:p>
-          <a:p>
-            <a:pPr>
-              <a:spcAft>
-                <a:spcPts val="600"/>
-              </a:spcAft>
-            </a:pPr>
-            <a:r>
-              <a:rPr sz="1500">
-                <a:solidFill>
-                  <a:srgbClr val="22282E"/>
-                </a:solidFill>
-              </a:rPr>
-              <a:t>•  Portfolio: elige 3 laboratorios de este programa (p. ej. la matriz de riesgo de la clase 277, el SoA de la 278, el SBOM de la 284) y planifica publicarlos como writeups en tu repositorio.</a:t>
-            </a:r>
-          </a:p>
-          <a:p>
-            <a:pPr>
-              <a:spcAft>
-                <a:spcPts val="600"/>
-              </a:spcAft>
-            </a:pPr>
-            <a:r>
-              <a:rPr sz="1500">
-                <a:solidFill>
-                  <a:srgbClr val="22282E"/>
-                </a:solidFill>
-              </a:rPr>
-              <a:t>•  Plan de estudio: para la primera certificación objetivo, desglosa los dominios del examen, asigna semanas de estudio y define cómo practicarás (labs, exámenes de prueba).</a:t>
+              <a:t>•  Hay dominio cuando el alumno justifica una ruta con fuentes oficiales, presupuesto, práctica y criterio para corregirla.</a:t>
             </a:r>
           </a:p>
         </p:txBody>
@@ -4599,7 +4960,7 @@
                   <a:srgbClr val="0B3D2E"/>
                 </a:solidFill>
               </a:rPr>
-              <a:t>✍️ Ejercicios</a:t>
+              <a:t>📖 Definiciones y características</a:t>
             </a:r>
           </a:p>
         </p:txBody>
@@ -4637,82 +4998,82 @@
                   <a:srgbClr val="22282E"/>
                 </a:solidFill>
               </a:rPr>
-              <a:t>•  Mapea 3 roles del NICE Framework a las competencias que aportan las partes de este programa.</a:t>
-            </a:r>
-          </a:p>
-          <a:p>
-            <a:pPr>
-              <a:spcAft>
-                <a:spcPts val="600"/>
-              </a:spcAft>
-            </a:pPr>
-            <a:r>
-              <a:rPr sz="1500">
-                <a:solidFill>
-                  <a:srgbClr val="22282E"/>
-                </a:solidFill>
-              </a:rPr>
-              <a:t>•  Compara CISSP y OSCP: propósito, formato y a quién sirven.</a:t>
-            </a:r>
-          </a:p>
-          <a:p>
-            <a:pPr>
-              <a:spcAft>
-                <a:spcPts val="600"/>
-              </a:spcAft>
-            </a:pPr>
-            <a:r>
-              <a:rPr sz="1500">
-                <a:solidFill>
-                  <a:srgbClr val="22282E"/>
-                </a:solidFill>
-              </a:rPr>
-              <a:t>•  Diseña un plan de estudio de 8 semanas para Security+.</a:t>
-            </a:r>
-          </a:p>
-          <a:p>
-            <a:pPr>
-              <a:spcAft>
-                <a:spcPts val="600"/>
-              </a:spcAft>
-            </a:pPr>
-            <a:r>
-              <a:rPr sz="1500">
-                <a:solidFill>
-                  <a:srgbClr val="22282E"/>
-                </a:solidFill>
-              </a:rPr>
-              <a:t>•  Elige 3 proyectos del curso y explica cómo los presentarías en una entrevista.</a:t>
-            </a:r>
-          </a:p>
-          <a:p>
-            <a:pPr>
-              <a:spcAft>
-                <a:spcPts val="600"/>
-              </a:spcAft>
-            </a:pPr>
-            <a:r>
-              <a:rPr sz="1500">
-                <a:solidFill>
-                  <a:srgbClr val="22282E"/>
-                </a:solidFill>
-              </a:rPr>
-              <a:t>•  Redacta tu titular profesional y un resumen de 4 líneas para LinkedIn.</a:t>
-            </a:r>
-          </a:p>
-          <a:p>
-            <a:pPr>
-              <a:spcAft>
-                <a:spcPts val="600"/>
-              </a:spcAft>
-            </a:pPr>
-            <a:r>
-              <a:rPr sz="1500">
-                <a:solidFill>
-                  <a:srgbClr val="22282E"/>
-                </a:solidFill>
-              </a:rPr>
-              <a:t>•  Analiza un dilema ético (bug bounty fuera de alcance) según un código de conducta.</a:t>
+              <a:t>•  NICE Framework: marco de NIST que describe roles, tareas y competencias en ciberseguridad. Clave: lenguaje común para roles y planes de carrera.</a:t>
+            </a:r>
+          </a:p>
+          <a:p>
+            <a:pPr>
+              <a:spcAft>
+                <a:spcPts val="600"/>
+              </a:spcAft>
+            </a:pPr>
+            <a:r>
+              <a:rPr sz="1500">
+                <a:solidFill>
+                  <a:srgbClr val="22282E"/>
+                </a:solidFill>
+              </a:rPr>
+              <a:t>•  Certificación fundacional: valida bases (CompTIA Security+, GSEC). Clave: puerta de entrada, no meta final.</a:t>
+            </a:r>
+          </a:p>
+          <a:p>
+            <a:pPr>
+              <a:spcAft>
+                <a:spcPts val="600"/>
+              </a:spcAft>
+            </a:pPr>
+            <a:r>
+              <a:rPr sz="1500">
+                <a:solidFill>
+                  <a:srgbClr val="22282E"/>
+                </a:solidFill>
+              </a:rPr>
+              <a:t>•  Certificación de especialización: valida un dominio (OSCP ofensivo, CISSP gestión, CCSP cloud, CISA auditoría). Clave: elige según tu ruta.</a:t>
+            </a:r>
+          </a:p>
+          <a:p>
+            <a:pPr>
+              <a:spcAft>
+                <a:spcPts val="600"/>
+              </a:spcAft>
+            </a:pPr>
+            <a:r>
+              <a:rPr sz="1500">
+                <a:solidFill>
+                  <a:srgbClr val="22282E"/>
+                </a:solidFill>
+              </a:rPr>
+              <a:t>•  CPE (Continuing Professional Education): créditos de formación para mantener una certificación. Clave: obligan a aprender de forma continua.</a:t>
+            </a:r>
+          </a:p>
+          <a:p>
+            <a:pPr>
+              <a:spcAft>
+                <a:spcPts val="600"/>
+              </a:spcAft>
+            </a:pPr>
+            <a:r>
+              <a:rPr sz="1500">
+                <a:solidFill>
+                  <a:srgbClr val="22282E"/>
+                </a:solidFill>
+              </a:rPr>
+              <a:t>•  Portfolio: conjunto de evidencias (labs, writeups, proyectos, CTFs) que demuestran competencia. Clave: prueba práctica, no solo teoría.</a:t>
+            </a:r>
+          </a:p>
+          <a:p>
+            <a:pPr>
+              <a:spcAft>
+                <a:spcPts val="600"/>
+              </a:spcAft>
+            </a:pPr>
+            <a:r>
+              <a:rPr sz="1500">
+                <a:solidFill>
+                  <a:srgbClr val="22282E"/>
+                </a:solidFill>
+              </a:rPr>
+              <a:t>•  Código de ética: normas de conducta profesional (p. ej. el Canon de (ISC)²). Clave: su incumplimiento cuesta la certificación y la reputación.</a:t>
             </a:r>
           </a:p>
         </p:txBody>
@@ -4763,7 +5124,7 @@
                   <a:srgbClr val="0B3D2E"/>
                 </a:solidFill>
               </a:rPr>
-              <a:t>📝 Reto verificable</a:t>
+              <a:t>🧰 Herramientas y preparación</a:t>
             </a:r>
           </a:p>
         </p:txBody>
@@ -4801,22 +5162,67 @@
                   <a:srgbClr val="22282E"/>
                 </a:solidFill>
               </a:rPr>
-              <a:t>•  Entrega tu plan de desarrollo profesional personal con: autoevaluación por áreas, ruta elegida, 3 roles objetivo con competencias NICE, secuencia de certificaciones a 24 meses, plan de estudio de la primera certificación desglosado por dominios y semanas, y un portfolio planificado con al menos 3 writeups de laboratorios del programa.</a:t>
-            </a:r>
-          </a:p>
-          <a:p>
-            <a:pPr>
-              <a:spcAft>
-                <a:spcPts val="600"/>
-              </a:spcAft>
-            </a:pPr>
-            <a:r>
-              <a:rPr sz="1500">
-                <a:solidFill>
-                  <a:srgbClr val="22282E"/>
-                </a:solidFill>
-              </a:rPr>
-              <a:t>•  Criterio de aceptación: la ruta y las certificaciones son coherentes con las fortalezas de la autoevaluación, el plan de estudio tiene hitos temporales concretos, y el portfolio referencia labs reales del curso con evidencia publicable.</a:t>
+              <a:t>•  El NICE Framework (NIST SP 800-181) para mapear roles y competencias.</a:t>
+            </a:r>
+          </a:p>
+          <a:p>
+            <a:pPr>
+              <a:spcAft>
+                <a:spcPts val="600"/>
+              </a:spcAft>
+            </a:pPr>
+            <a:r>
+              <a:rPr sz="1500">
+                <a:solidFill>
+                  <a:srgbClr val="22282E"/>
+                </a:solidFill>
+              </a:rPr>
+              <a:t>•  Plataformas de práctica: TryHackMe, Hack The Box, laboratorios propios (los de este programa).</a:t>
+            </a:r>
+          </a:p>
+          <a:p>
+            <a:pPr>
+              <a:spcAft>
+                <a:spcPts val="600"/>
+              </a:spcAft>
+            </a:pPr>
+            <a:r>
+              <a:rPr sz="1500">
+                <a:solidFill>
+                  <a:srgbClr val="22282E"/>
+                </a:solidFill>
+              </a:rPr>
+              <a:t>•  Un repositorio (GitHub/GitLab) para publicar writeups y proyectos como portfolio.</a:t>
+            </a:r>
+          </a:p>
+          <a:p>
+            <a:pPr>
+              <a:spcAft>
+                <a:spcPts val="600"/>
+              </a:spcAft>
+            </a:pPr>
+            <a:r>
+              <a:rPr sz="1500">
+                <a:solidFill>
+                  <a:srgbClr val="22282E"/>
+                </a:solidFill>
+              </a:rPr>
+              <a:t>•  Un perfil profesional actualizado (LinkedIn) y, si aplica, un blog técnico.</a:t>
+            </a:r>
+          </a:p>
+          <a:p>
+            <a:pPr>
+              <a:spcAft>
+                <a:spcPts val="600"/>
+              </a:spcAft>
+            </a:pPr>
+            <a:r>
+              <a:rPr sz="1500">
+                <a:solidFill>
+                  <a:srgbClr val="22282E"/>
+                </a:solidFill>
+              </a:rPr>
+              <a:t>•  Guías oficiales de las certificaciones objetivo (dominios y esquema de examen).</a:t>
             </a:r>
           </a:p>
         </p:txBody>
